--- a/media/module1/slides.pptx
+++ b/media/module1/slides.pptx
@@ -3675,8 +3675,8 @@
         </p:nvSpPr>
         <p:spPr>
           <a:xfrm>
-            <a:off x="548640" y="2011680"/>
-            <a:ext cx="11064240" cy="2286000"/>
+            <a:off x="548640" y="1828800"/>
+            <a:ext cx="11064240" cy="2743200"/>
           </a:xfrm>
           <a:prstGeom prst="rect">
             <a:avLst/>
@@ -3685,15 +3685,22 @@
         </p:spPr>
         <p:txBody>
           <a:bodyPr wrap="square">
-            <a:spAutoFit/>
+            <a:noAutofit/>
           </a:bodyPr>
           <a:lstStyle/>
           <a:p>
             <a:pPr algn="ctr">
-              <a:defRPr sz="4400" b="1">
+              <a:lnSpc>
+                <a:spcPts val="2200"/>
+              </a:lnSpc>
+              <a:spcAft>
+                <a:spcPts val="400"/>
+              </a:spcAft>
+              <a:defRPr sz="4000" b="1">
                 <a:solidFill>
                   <a:srgbClr val="1A1A2E"/>
                 </a:solidFill>
+                <a:latin typeface="Calibri"/>
               </a:defRPr>
             </a:pPr>
             <a:r>
@@ -3702,13 +3709,17 @@
           </a:p>
           <a:p>
             <a:pPr algn="ctr">
+              <a:lnSpc>
+                <a:spcPts val="2200"/>
+              </a:lnSpc>
               <a:spcBef>
-                <a:spcPts val="1200"/>
+                <a:spcPts val="1400"/>
               </a:spcBef>
-              <a:defRPr sz="3200">
+              <a:defRPr sz="2600" b="0">
                 <a:solidFill>
                   <a:srgbClr val="333333"/>
                 </a:solidFill>
+                <a:latin typeface="Calibri"/>
               </a:defRPr>
             </a:pPr>
             <a:r>
@@ -3734,16 +3745,20 @@
           <a:noFill/>
         </p:spPr>
         <p:txBody>
-          <a:bodyPr wrap="none">
-            <a:spAutoFit/>
+          <a:bodyPr wrap="square">
+            <a:noAutofit/>
           </a:bodyPr>
           <a:lstStyle/>
           <a:p>
             <a:pPr algn="r">
-              <a:defRPr sz="1000">
+              <a:lnSpc>
+                <a:spcPts val="2200"/>
+              </a:lnSpc>
+              <a:defRPr sz="1000" b="0">
                 <a:solidFill>
                   <a:srgbClr val="666666"/>
                 </a:solidFill>
+                <a:latin typeface="Calibri"/>
               </a:defRPr>
             </a:pPr>
             <a:r>
@@ -3778,8 +3793,8 @@
         </p:nvSpPr>
         <p:spPr>
           <a:xfrm>
-            <a:off x="548640" y="457200"/>
-            <a:ext cx="11064240" cy="731520"/>
+            <a:off x="548640" y="411480"/>
+            <a:ext cx="11064240" cy="777240"/>
           </a:xfrm>
           <a:prstGeom prst="rect">
             <a:avLst/>
@@ -3787,16 +3802,20 @@
           <a:noFill/>
         </p:spPr>
         <p:txBody>
-          <a:bodyPr wrap="none">
-            <a:spAutoFit/>
+          <a:bodyPr wrap="square">
+            <a:noAutofit/>
           </a:bodyPr>
           <a:lstStyle/>
           <a:p>
             <a:pPr>
-              <a:defRPr sz="3200" b="1">
+              <a:lnSpc>
+                <a:spcPts val="2200"/>
+              </a:lnSpc>
+              <a:defRPr sz="2800" b="1">
                 <a:solidFill>
                   <a:srgbClr val="1A1A2E"/>
                 </a:solidFill>
+                <a:latin typeface="Calibri"/>
               </a:defRPr>
             </a:pPr>
             <a:r>
@@ -3813,27 +3832,57 @@
         </p:nvSpPr>
         <p:spPr>
           <a:xfrm>
-            <a:off x="548640" y="1143000"/>
-            <a:ext cx="11064240" cy="548640"/>
+            <a:off x="548640" y="1051560"/>
+            <a:ext cx="11064240" cy="914400"/>
           </a:xfrm>
           <a:prstGeom prst="rect">
             <a:avLst/>
           </a:prstGeom>
-          <a:noFill/>
-        </p:spPr>
-        <p:txBody>
-          <a:bodyPr wrap="none">
-            <a:spAutoFit/>
+          <a:solidFill>
+            <a:srgbClr val="F4F4F4"/>
+          </a:solidFill>
+        </p:spPr>
+        <p:txBody>
+          <a:bodyPr wrap="square">
+            <a:noAutofit/>
           </a:bodyPr>
           <a:lstStyle/>
           <a:p>
             <a:pPr>
-              <a:defRPr sz="1400">
+              <a:lnSpc>
+                <a:spcPts val="2200"/>
+              </a:lnSpc>
+              <a:spcAft>
+                <a:spcPts val="200"/>
+              </a:spcAft>
+              <a:defRPr sz="2000" b="0">
+                <a:solidFill>
+                  <a:srgbClr val="333333"/>
+                </a:solidFill>
                 <a:latin typeface="Consolas"/>
               </a:defRPr>
             </a:pPr>
             <a:r>
-              <a:t>$ cd module1/examples/navigation/sample_repo &amp;&amp; pwd &amp;&amp; ls -la &amp;&amp; cd src &amp;&amp; pwd &amp;&amp; ls</a:t>
+              <a:t>$ cd module1/examples/navigation/sample_repo &amp;&amp; pwd &amp;&amp; ls -la &amp;&amp; cd</a:t>
+            </a:r>
+          </a:p>
+          <a:p>
+            <a:pPr>
+              <a:lnSpc>
+                <a:spcPts val="2200"/>
+              </a:lnSpc>
+              <a:spcAft>
+                <a:spcPts val="200"/>
+              </a:spcAft>
+              <a:defRPr sz="2000" b="0">
+                <a:solidFill>
+                  <a:srgbClr val="333333"/>
+                </a:solidFill>
+                <a:latin typeface="Consolas"/>
+              </a:defRPr>
+            </a:pPr>
+            <a:r>
+              <a:t>      src &amp;&amp; pwd &amp;&amp; ls</a:t>
             </a:r>
           </a:p>
         </p:txBody>
@@ -3854,8 +3903,8 @@
         </p:blipFill>
         <p:spPr>
           <a:xfrm>
-            <a:off x="548640" y="1828800"/>
-            <a:ext cx="11064240" cy="3840480"/>
+            <a:off x="548640" y="1965960"/>
+            <a:ext cx="7071358" cy="3977639"/>
           </a:xfrm>
           <a:prstGeom prst="rect">
             <a:avLst/>
@@ -3879,16 +3928,20 @@
           <a:noFill/>
         </p:spPr>
         <p:txBody>
-          <a:bodyPr wrap="none">
-            <a:spAutoFit/>
+          <a:bodyPr wrap="square">
+            <a:noAutofit/>
           </a:bodyPr>
           <a:lstStyle/>
           <a:p>
             <a:pPr algn="r">
-              <a:defRPr sz="1000">
+              <a:lnSpc>
+                <a:spcPts val="2200"/>
+              </a:lnSpc>
+              <a:defRPr sz="1000" b="0">
                 <a:solidFill>
                   <a:srgbClr val="666666"/>
                 </a:solidFill>
+                <a:latin typeface="Calibri"/>
               </a:defRPr>
             </a:pPr>
             <a:r>
@@ -3932,13 +3985,21 @@
           <a:noFill/>
         </p:spPr>
         <p:txBody>
-          <a:bodyPr wrap="none">
-            <a:spAutoFit/>
+          <a:bodyPr wrap="square">
+            <a:noAutofit/>
           </a:bodyPr>
           <a:lstStyle/>
           <a:p>
             <a:pPr algn="ctr">
-              <a:defRPr sz="4000" b="1"/>
+              <a:lnSpc>
+                <a:spcPts val="2200"/>
+              </a:lnSpc>
+              <a:defRPr sz="3600" b="1">
+                <a:solidFill>
+                  <a:srgbClr val="1A1A2E"/>
+                </a:solidFill>
+                <a:latin typeface="Calibri"/>
+              </a:defRPr>
             </a:pPr>
             <a:r>
               <a:t>Files &amp; viewing</a:t>
@@ -3963,16 +4024,20 @@
           <a:noFill/>
         </p:spPr>
         <p:txBody>
-          <a:bodyPr wrap="none">
-            <a:spAutoFit/>
+          <a:bodyPr wrap="square">
+            <a:noAutofit/>
           </a:bodyPr>
           <a:lstStyle/>
           <a:p>
             <a:pPr algn="r">
-              <a:defRPr sz="1000">
+              <a:lnSpc>
+                <a:spcPts val="2200"/>
+              </a:lnSpc>
+              <a:defRPr sz="1000" b="0">
                 <a:solidFill>
                   <a:srgbClr val="666666"/>
                 </a:solidFill>
+                <a:latin typeface="Calibri"/>
               </a:defRPr>
             </a:pPr>
             <a:r>
@@ -4007,8 +4072,8 @@
         </p:nvSpPr>
         <p:spPr>
           <a:xfrm>
-            <a:off x="548640" y="457200"/>
-            <a:ext cx="11064240" cy="731520"/>
+            <a:off x="548640" y="411480"/>
+            <a:ext cx="11064240" cy="777240"/>
           </a:xfrm>
           <a:prstGeom prst="rect">
             <a:avLst/>
@@ -4016,16 +4081,20 @@
           <a:noFill/>
         </p:spPr>
         <p:txBody>
-          <a:bodyPr wrap="none">
-            <a:spAutoFit/>
+          <a:bodyPr wrap="square">
+            <a:noAutofit/>
           </a:bodyPr>
           <a:lstStyle/>
           <a:p>
             <a:pPr>
-              <a:defRPr sz="3200" b="1">
+              <a:lnSpc>
+                <a:spcPts val="2200"/>
+              </a:lnSpc>
+              <a:defRPr sz="2800" b="1">
                 <a:solidFill>
                   <a:srgbClr val="1A1A2E"/>
                 </a:solidFill>
+                <a:latin typeface="Calibri"/>
               </a:defRPr>
             </a:pPr>
             <a:r>
@@ -4042,8 +4111,8 @@
         </p:nvSpPr>
         <p:spPr>
           <a:xfrm>
-            <a:off x="548640" y="1280160"/>
-            <a:ext cx="11064240" cy="4754880"/>
+            <a:off x="548640" y="1234440"/>
+            <a:ext cx="11064240" cy="4937760"/>
           </a:xfrm>
           <a:prstGeom prst="rect">
             <a:avLst/>
@@ -4052,52 +4121,64 @@
         </p:spPr>
         <p:txBody>
           <a:bodyPr wrap="square">
-            <a:spAutoFit/>
+            <a:noAutofit/>
           </a:bodyPr>
           <a:lstStyle/>
           <a:p>
             <a:pPr>
+              <a:lnSpc>
+                <a:spcPts val="2200"/>
+              </a:lnSpc>
               <a:spcAft>
-                <a:spcPts val="800"/>
+                <a:spcPts val="1000"/>
               </a:spcAft>
-              <a:defRPr sz="2000">
+              <a:defRPr sz="2000" b="0">
                 <a:solidFill>
                   <a:srgbClr val="333333"/>
                 </a:solidFill>
-              </a:defRPr>
-            </a:pPr>
-            <a:r>
-              <a:t>mkdir -p for nested directories</a:t>
+                <a:latin typeface="Calibri"/>
+              </a:defRPr>
+            </a:pPr>
+            <a:r>
+              <a:t>• mkdir -p for nested directories</a:t>
             </a:r>
           </a:p>
           <a:p>
             <a:pPr>
+              <a:lnSpc>
+                <a:spcPts val="2200"/>
+              </a:lnSpc>
               <a:spcAft>
-                <a:spcPts val="800"/>
+                <a:spcPts val="1000"/>
               </a:spcAft>
-              <a:defRPr sz="2000">
+              <a:defRPr sz="2000" b="0">
                 <a:solidFill>
                   <a:srgbClr val="333333"/>
                 </a:solidFill>
-              </a:defRPr>
-            </a:pPr>
-            <a:r>
-              <a:t>cp and mv for copy and rename</a:t>
+                <a:latin typeface="Calibri"/>
+              </a:defRPr>
+            </a:pPr>
+            <a:r>
+              <a:t>• cp and mv for copy and rename</a:t>
             </a:r>
           </a:p>
           <a:p>
             <a:pPr>
+              <a:lnSpc>
+                <a:spcPts val="2200"/>
+              </a:lnSpc>
               <a:spcAft>
-                <a:spcPts val="800"/>
+                <a:spcPts val="1000"/>
               </a:spcAft>
-              <a:defRPr sz="2000">
+              <a:defRPr sz="2000" b="0">
                 <a:solidFill>
                   <a:srgbClr val="333333"/>
                 </a:solidFill>
-              </a:defRPr>
-            </a:pPr>
-            <a:r>
-              <a:t>rm and rm -r — use carefully; avoid rm -rf mistakes</a:t>
+                <a:latin typeface="Calibri"/>
+              </a:defRPr>
+            </a:pPr>
+            <a:r>
+              <a:t>• rm and rm -r — use carefully; avoid rm -rf mistakes</a:t>
             </a:r>
           </a:p>
         </p:txBody>
@@ -4119,16 +4200,20 @@
           <a:noFill/>
         </p:spPr>
         <p:txBody>
-          <a:bodyPr wrap="none">
-            <a:spAutoFit/>
+          <a:bodyPr wrap="square">
+            <a:noAutofit/>
           </a:bodyPr>
           <a:lstStyle/>
           <a:p>
             <a:pPr algn="r">
-              <a:defRPr sz="1000">
+              <a:lnSpc>
+                <a:spcPts val="2200"/>
+              </a:lnSpc>
+              <a:defRPr sz="1000" b="0">
                 <a:solidFill>
                   <a:srgbClr val="666666"/>
                 </a:solidFill>
+                <a:latin typeface="Calibri"/>
               </a:defRPr>
             </a:pPr>
             <a:r>
@@ -4163,8 +4248,8 @@
         </p:nvSpPr>
         <p:spPr>
           <a:xfrm>
-            <a:off x="548640" y="457200"/>
-            <a:ext cx="11064240" cy="731520"/>
+            <a:off x="548640" y="411480"/>
+            <a:ext cx="11064240" cy="777240"/>
           </a:xfrm>
           <a:prstGeom prst="rect">
             <a:avLst/>
@@ -4172,16 +4257,20 @@
           <a:noFill/>
         </p:spPr>
         <p:txBody>
-          <a:bodyPr wrap="none">
-            <a:spAutoFit/>
+          <a:bodyPr wrap="square">
+            <a:noAutofit/>
           </a:bodyPr>
           <a:lstStyle/>
           <a:p>
             <a:pPr>
-              <a:defRPr sz="3200" b="1">
+              <a:lnSpc>
+                <a:spcPts val="2200"/>
+              </a:lnSpc>
+              <a:defRPr sz="2800" b="1">
                 <a:solidFill>
                   <a:srgbClr val="1A1A2E"/>
                 </a:solidFill>
+                <a:latin typeface="Calibri"/>
               </a:defRPr>
             </a:pPr>
             <a:r>
@@ -4198,7 +4287,7 @@
         </p:nvSpPr>
         <p:spPr>
           <a:xfrm>
-            <a:off x="548640" y="1234440"/>
+            <a:off x="548640" y="1143000"/>
             <a:ext cx="11064240" cy="5029200"/>
           </a:xfrm>
           <a:prstGeom prst="rect">
@@ -4210,12 +4299,18 @@
         </p:spPr>
         <p:txBody>
           <a:bodyPr wrap="square">
-            <a:spAutoFit/>
+            <a:noAutofit/>
           </a:bodyPr>
           <a:lstStyle/>
           <a:p>
             <a:pPr>
-              <a:defRPr sz="1400">
+              <a:lnSpc>
+                <a:spcPts val="2200"/>
+              </a:lnSpc>
+              <a:spcAft>
+                <a:spcPts val="400"/>
+              </a:spcAft>
+              <a:defRPr sz="2000" b="0">
                 <a:solidFill>
                   <a:srgbClr val="333333"/>
                 </a:solidFill>
@@ -4225,11 +4320,41 @@
             <a:r>
               <a:t>mkdir ~/unix_practice</a:t>
             </a:r>
-            <a:br/>
+          </a:p>
+          <a:p>
+            <a:pPr>
+              <a:lnSpc>
+                <a:spcPts val="2200"/>
+              </a:lnSpc>
+              <a:spcAft>
+                <a:spcPts val="400"/>
+              </a:spcAft>
+              <a:defRPr sz="2000" b="0">
+                <a:solidFill>
+                  <a:srgbClr val="333333"/>
+                </a:solidFill>
+                <a:latin typeface="Consolas"/>
+              </a:defRPr>
+            </a:pPr>
             <a:r>
               <a:t>mkdir ~/unix_practice/notes ~/unix_practice/projects</a:t>
             </a:r>
-            <a:br/>
+          </a:p>
+          <a:p>
+            <a:pPr>
+              <a:lnSpc>
+                <a:spcPts val="2200"/>
+              </a:lnSpc>
+              <a:spcAft>
+                <a:spcPts val="400"/>
+              </a:spcAft>
+              <a:defRPr sz="2000" b="0">
+                <a:solidFill>
+                  <a:srgbClr val="333333"/>
+                </a:solidFill>
+                <a:latin typeface="Consolas"/>
+              </a:defRPr>
+            </a:pPr>
             <a:r>
               <a:t>cd ~/unix_practice &amp;&amp; pwd</a:t>
             </a:r>
@@ -4253,16 +4378,20 @@
           <a:noFill/>
         </p:spPr>
         <p:txBody>
-          <a:bodyPr wrap="none">
-            <a:spAutoFit/>
+          <a:bodyPr wrap="square">
+            <a:noAutofit/>
           </a:bodyPr>
           <a:lstStyle/>
           <a:p>
             <a:pPr algn="r">
-              <a:defRPr sz="1000">
+              <a:lnSpc>
+                <a:spcPts val="2200"/>
+              </a:lnSpc>
+              <a:defRPr sz="1000" b="0">
                 <a:solidFill>
                   <a:srgbClr val="666666"/>
                 </a:solidFill>
+                <a:latin typeface="Calibri"/>
               </a:defRPr>
             </a:pPr>
             <a:r>
@@ -4297,8 +4426,8 @@
         </p:nvSpPr>
         <p:spPr>
           <a:xfrm>
-            <a:off x="548640" y="457200"/>
-            <a:ext cx="11064240" cy="731520"/>
+            <a:off x="548640" y="411480"/>
+            <a:ext cx="11064240" cy="777240"/>
           </a:xfrm>
           <a:prstGeom prst="rect">
             <a:avLst/>
@@ -4306,16 +4435,20 @@
           <a:noFill/>
         </p:spPr>
         <p:txBody>
-          <a:bodyPr wrap="none">
-            <a:spAutoFit/>
+          <a:bodyPr wrap="square">
+            <a:noAutofit/>
           </a:bodyPr>
           <a:lstStyle/>
           <a:p>
             <a:pPr>
-              <a:defRPr sz="3200" b="1">
+              <a:lnSpc>
+                <a:spcPts val="2200"/>
+              </a:lnSpc>
+              <a:defRPr sz="2800" b="1">
                 <a:solidFill>
                   <a:srgbClr val="1A1A2E"/>
                 </a:solidFill>
+                <a:latin typeface="Calibri"/>
               </a:defRPr>
             </a:pPr>
             <a:r>
@@ -4332,27 +4465,57 @@
         </p:nvSpPr>
         <p:spPr>
           <a:xfrm>
-            <a:off x="548640" y="1143000"/>
-            <a:ext cx="11064240" cy="548640"/>
+            <a:off x="548640" y="1051560"/>
+            <a:ext cx="11064240" cy="914400"/>
           </a:xfrm>
           <a:prstGeom prst="rect">
             <a:avLst/>
           </a:prstGeom>
-          <a:noFill/>
-        </p:spPr>
-        <p:txBody>
-          <a:bodyPr wrap="none">
-            <a:spAutoFit/>
+          <a:solidFill>
+            <a:srgbClr val="F4F4F4"/>
+          </a:solidFill>
+        </p:spPr>
+        <p:txBody>
+          <a:bodyPr wrap="square">
+            <a:noAutofit/>
           </a:bodyPr>
           <a:lstStyle/>
           <a:p>
             <a:pPr>
-              <a:defRPr sz="1400">
+              <a:lnSpc>
+                <a:spcPts val="2200"/>
+              </a:lnSpc>
+              <a:spcAft>
+                <a:spcPts val="200"/>
+              </a:spcAft>
+              <a:defRPr sz="2000" b="0">
+                <a:solidFill>
+                  <a:srgbClr val="333333"/>
+                </a:solidFill>
                 <a:latin typeface="Consolas"/>
               </a:defRPr>
             </a:pPr>
             <a:r>
-              <a:t>$ head -n 5 module1/examples/viewing/sample_for_viewing.txt &amp;&amp; tail -n 3 module1/examples/viewing/sample_for_viewing.txt</a:t>
+              <a:t>$ head -n 5 module1/examples/viewing/sample_for_viewing.txt &amp;&amp; tail -n</a:t>
+            </a:r>
+          </a:p>
+          <a:p>
+            <a:pPr>
+              <a:lnSpc>
+                <a:spcPts val="2200"/>
+              </a:lnSpc>
+              <a:spcAft>
+                <a:spcPts val="200"/>
+              </a:spcAft>
+              <a:defRPr sz="2000" b="0">
+                <a:solidFill>
+                  <a:srgbClr val="333333"/>
+                </a:solidFill>
+                <a:latin typeface="Consolas"/>
+              </a:defRPr>
+            </a:pPr>
+            <a:r>
+              <a:t>      3 module1/examples/viewing/sample_for_viewing.txt</a:t>
             </a:r>
           </a:p>
         </p:txBody>
@@ -4373,8 +4536,8 @@
         </p:blipFill>
         <p:spPr>
           <a:xfrm>
-            <a:off x="548640" y="1828800"/>
-            <a:ext cx="11064240" cy="3840480"/>
+            <a:off x="548640" y="1965960"/>
+            <a:ext cx="7071358" cy="3977639"/>
           </a:xfrm>
           <a:prstGeom prst="rect">
             <a:avLst/>
@@ -4398,16 +4561,20 @@
           <a:noFill/>
         </p:spPr>
         <p:txBody>
-          <a:bodyPr wrap="none">
-            <a:spAutoFit/>
+          <a:bodyPr wrap="square">
+            <a:noAutofit/>
           </a:bodyPr>
           <a:lstStyle/>
           <a:p>
             <a:pPr algn="r">
-              <a:defRPr sz="1000">
+              <a:lnSpc>
+                <a:spcPts val="2200"/>
+              </a:lnSpc>
+              <a:defRPr sz="1000" b="0">
                 <a:solidFill>
                   <a:srgbClr val="666666"/>
                 </a:solidFill>
+                <a:latin typeface="Calibri"/>
               </a:defRPr>
             </a:pPr>
             <a:r>
@@ -4442,8 +4609,8 @@
         </p:nvSpPr>
         <p:spPr>
           <a:xfrm>
-            <a:off x="548640" y="457200"/>
-            <a:ext cx="11064240" cy="731520"/>
+            <a:off x="548640" y="411480"/>
+            <a:ext cx="11064240" cy="777240"/>
           </a:xfrm>
           <a:prstGeom prst="rect">
             <a:avLst/>
@@ -4451,16 +4618,20 @@
           <a:noFill/>
         </p:spPr>
         <p:txBody>
-          <a:bodyPr wrap="none">
-            <a:spAutoFit/>
+          <a:bodyPr wrap="square">
+            <a:noAutofit/>
           </a:bodyPr>
           <a:lstStyle/>
           <a:p>
             <a:pPr>
-              <a:defRPr sz="3200" b="1">
+              <a:lnSpc>
+                <a:spcPts val="2200"/>
+              </a:lnSpc>
+              <a:defRPr sz="2800" b="1">
                 <a:solidFill>
                   <a:srgbClr val="1A1A2E"/>
                 </a:solidFill>
+                <a:latin typeface="Calibri"/>
               </a:defRPr>
             </a:pPr>
             <a:r>
@@ -4477,7 +4648,7 @@
         </p:nvSpPr>
         <p:spPr>
           <a:xfrm>
-            <a:off x="548640" y="1234440"/>
+            <a:off x="548640" y="1143000"/>
             <a:ext cx="11064240" cy="5029200"/>
           </a:xfrm>
           <a:prstGeom prst="rect">
@@ -4489,12 +4660,18 @@
         </p:spPr>
         <p:txBody>
           <a:bodyPr wrap="square">
-            <a:spAutoFit/>
+            <a:noAutofit/>
           </a:bodyPr>
           <a:lstStyle/>
           <a:p>
             <a:pPr>
-              <a:defRPr sz="1400">
+              <a:lnSpc>
+                <a:spcPts val="2200"/>
+              </a:lnSpc>
+              <a:spcAft>
+                <a:spcPts val="400"/>
+              </a:spcAft>
+              <a:defRPr sz="2000" b="0">
                 <a:solidFill>
                   <a:srgbClr val="333333"/>
                 </a:solidFill>
@@ -4524,16 +4701,20 @@
           <a:noFill/>
         </p:spPr>
         <p:txBody>
-          <a:bodyPr wrap="none">
-            <a:spAutoFit/>
+          <a:bodyPr wrap="square">
+            <a:noAutofit/>
           </a:bodyPr>
           <a:lstStyle/>
           <a:p>
             <a:pPr algn="r">
-              <a:defRPr sz="1000">
+              <a:lnSpc>
+                <a:spcPts val="2200"/>
+              </a:lnSpc>
+              <a:defRPr sz="1000" b="0">
                 <a:solidFill>
                   <a:srgbClr val="666666"/>
                 </a:solidFill>
+                <a:latin typeface="Calibri"/>
               </a:defRPr>
             </a:pPr>
             <a:r>
@@ -4577,13 +4758,21 @@
           <a:noFill/>
         </p:spPr>
         <p:txBody>
-          <a:bodyPr wrap="none">
-            <a:spAutoFit/>
+          <a:bodyPr wrap="square">
+            <a:noAutofit/>
           </a:bodyPr>
           <a:lstStyle/>
           <a:p>
             <a:pPr algn="ctr">
-              <a:defRPr sz="4000" b="1"/>
+              <a:lnSpc>
+                <a:spcPts val="2200"/>
+              </a:lnSpc>
+              <a:defRPr sz="3600" b="1">
+                <a:solidFill>
+                  <a:srgbClr val="1A1A2E"/>
+                </a:solidFill>
+                <a:latin typeface="Calibri"/>
+              </a:defRPr>
             </a:pPr>
             <a:r>
               <a:t>Help &amp; practice</a:t>
@@ -4608,16 +4797,20 @@
           <a:noFill/>
         </p:spPr>
         <p:txBody>
-          <a:bodyPr wrap="none">
-            <a:spAutoFit/>
+          <a:bodyPr wrap="square">
+            <a:noAutofit/>
           </a:bodyPr>
           <a:lstStyle/>
           <a:p>
             <a:pPr algn="r">
-              <a:defRPr sz="1000">
+              <a:lnSpc>
+                <a:spcPts val="2200"/>
+              </a:lnSpc>
+              <a:defRPr sz="1000" b="0">
                 <a:solidFill>
                   <a:srgbClr val="666666"/>
                 </a:solidFill>
+                <a:latin typeface="Calibri"/>
               </a:defRPr>
             </a:pPr>
             <a:r>
@@ -4652,8 +4845,8 @@
         </p:nvSpPr>
         <p:spPr>
           <a:xfrm>
-            <a:off x="548640" y="457200"/>
-            <a:ext cx="11064240" cy="731520"/>
+            <a:off x="548640" y="411480"/>
+            <a:ext cx="11064240" cy="777240"/>
           </a:xfrm>
           <a:prstGeom prst="rect">
             <a:avLst/>
@@ -4661,16 +4854,20 @@
           <a:noFill/>
         </p:spPr>
         <p:txBody>
-          <a:bodyPr wrap="none">
-            <a:spAutoFit/>
+          <a:bodyPr wrap="square">
+            <a:noAutofit/>
           </a:bodyPr>
           <a:lstStyle/>
           <a:p>
             <a:pPr>
-              <a:defRPr sz="3200" b="1">
+              <a:lnSpc>
+                <a:spcPts val="2200"/>
+              </a:lnSpc>
+              <a:defRPr sz="2800" b="1">
                 <a:solidFill>
                   <a:srgbClr val="1A1A2E"/>
                 </a:solidFill>
+                <a:latin typeface="Calibri"/>
               </a:defRPr>
             </a:pPr>
             <a:r>
@@ -4687,8 +4884,8 @@
         </p:nvSpPr>
         <p:spPr>
           <a:xfrm>
-            <a:off x="548640" y="1280160"/>
-            <a:ext cx="11064240" cy="4754880"/>
+            <a:off x="548640" y="1234440"/>
+            <a:ext cx="11064240" cy="4937760"/>
           </a:xfrm>
           <a:prstGeom prst="rect">
             <a:avLst/>
@@ -4697,67 +4894,83 @@
         </p:spPr>
         <p:txBody>
           <a:bodyPr wrap="square">
-            <a:spAutoFit/>
+            <a:noAutofit/>
           </a:bodyPr>
           <a:lstStyle/>
           <a:p>
             <a:pPr>
+              <a:lnSpc>
+                <a:spcPts val="2200"/>
+              </a:lnSpc>
               <a:spcAft>
-                <a:spcPts val="800"/>
+                <a:spcPts val="1000"/>
               </a:spcAft>
-              <a:defRPr sz="2000">
+              <a:defRPr sz="2000" b="0">
                 <a:solidFill>
                   <a:srgbClr val="333333"/>
                 </a:solidFill>
-              </a:defRPr>
-            </a:pPr>
-            <a:r>
-              <a:t>man ls — full manual (Space, q to quit)</a:t>
+                <a:latin typeface="Calibri"/>
+              </a:defRPr>
+            </a:pPr>
+            <a:r>
+              <a:t>• man ls — full manual (Space, q to quit)</a:t>
             </a:r>
           </a:p>
           <a:p>
             <a:pPr>
+              <a:lnSpc>
+                <a:spcPts val="2200"/>
+              </a:lnSpc>
               <a:spcAft>
-                <a:spcPts val="800"/>
+                <a:spcPts val="1000"/>
               </a:spcAft>
-              <a:defRPr sz="2000">
+              <a:defRPr sz="2000" b="0">
                 <a:solidFill>
                   <a:srgbClr val="333333"/>
                 </a:solidFill>
-              </a:defRPr>
-            </a:pPr>
-            <a:r>
-              <a:t>ls --help — short option summary</a:t>
+                <a:latin typeface="Calibri"/>
+              </a:defRPr>
+            </a:pPr>
+            <a:r>
+              <a:t>• ls --help — short option summary</a:t>
             </a:r>
           </a:p>
           <a:p>
             <a:pPr>
+              <a:lnSpc>
+                <a:spcPts val="2200"/>
+              </a:lnSpc>
               <a:spcAft>
-                <a:spcPts val="800"/>
+                <a:spcPts val="1000"/>
               </a:spcAft>
-              <a:defRPr sz="2000">
+              <a:defRPr sz="2000" b="0">
                 <a:solidFill>
                   <a:srgbClr val="333333"/>
                 </a:solidFill>
-              </a:defRPr>
-            </a:pPr>
-            <a:r>
-              <a:t>Tab completion for commands and paths</a:t>
+                <a:latin typeface="Calibri"/>
+              </a:defRPr>
+            </a:pPr>
+            <a:r>
+              <a:t>• Tab completion for commands and paths</a:t>
             </a:r>
           </a:p>
           <a:p>
             <a:pPr>
+              <a:lnSpc>
+                <a:spcPts val="2200"/>
+              </a:lnSpc>
               <a:spcAft>
-                <a:spcPts val="800"/>
+                <a:spcPts val="1000"/>
               </a:spcAft>
-              <a:defRPr sz="2000">
+              <a:defRPr sz="2000" b="0">
                 <a:solidFill>
                   <a:srgbClr val="333333"/>
                 </a:solidFill>
-              </a:defRPr>
-            </a:pPr>
-            <a:r>
-              <a:t>History with ↑ and ↓ (Ctrl+R in bash)</a:t>
+                <a:latin typeface="Calibri"/>
+              </a:defRPr>
+            </a:pPr>
+            <a:r>
+              <a:t>• History with ↑ and ↓ (Ctrl+R in bash)</a:t>
             </a:r>
           </a:p>
         </p:txBody>
@@ -4779,16 +4992,20 @@
           <a:noFill/>
         </p:spPr>
         <p:txBody>
-          <a:bodyPr wrap="none">
-            <a:spAutoFit/>
+          <a:bodyPr wrap="square">
+            <a:noAutofit/>
           </a:bodyPr>
           <a:lstStyle/>
           <a:p>
             <a:pPr algn="r">
-              <a:defRPr sz="1000">
+              <a:lnSpc>
+                <a:spcPts val="2200"/>
+              </a:lnSpc>
+              <a:defRPr sz="1000" b="0">
                 <a:solidFill>
                   <a:srgbClr val="666666"/>
                 </a:solidFill>
+                <a:latin typeface="Calibri"/>
               </a:defRPr>
             </a:pPr>
             <a:r>
@@ -4823,8 +5040,8 @@
         </p:nvSpPr>
         <p:spPr>
           <a:xfrm>
-            <a:off x="548640" y="457200"/>
-            <a:ext cx="11064240" cy="731520"/>
+            <a:off x="548640" y="411480"/>
+            <a:ext cx="11064240" cy="777240"/>
           </a:xfrm>
           <a:prstGeom prst="rect">
             <a:avLst/>
@@ -4832,16 +5049,20 @@
           <a:noFill/>
         </p:spPr>
         <p:txBody>
-          <a:bodyPr wrap="none">
-            <a:spAutoFit/>
+          <a:bodyPr wrap="square">
+            <a:noAutofit/>
           </a:bodyPr>
           <a:lstStyle/>
           <a:p>
             <a:pPr>
-              <a:defRPr sz="3200" b="1">
+              <a:lnSpc>
+                <a:spcPts val="2200"/>
+              </a:lnSpc>
+              <a:defRPr sz="2800" b="1">
                 <a:solidFill>
                   <a:srgbClr val="1A1A2E"/>
                 </a:solidFill>
+                <a:latin typeface="Calibri"/>
               </a:defRPr>
             </a:pPr>
             <a:r>
@@ -4858,7 +5079,7 @@
         </p:nvSpPr>
         <p:spPr>
           <a:xfrm>
-            <a:off x="548640" y="1280160"/>
+            <a:off x="548640" y="1234440"/>
             <a:ext cx="5303520" cy="4754880"/>
           </a:xfrm>
           <a:prstGeom prst="rect">
@@ -4867,32 +5088,103 @@
           <a:noFill/>
         </p:spPr>
         <p:txBody>
-          <a:bodyPr wrap="none">
-            <a:spAutoFit/>
+          <a:bodyPr wrap="square">
+            <a:noAutofit/>
           </a:bodyPr>
           <a:lstStyle/>
           <a:p>
             <a:pPr>
-              <a:defRPr sz="2000"/>
-            </a:pPr>
-            <a:r>
-              <a:t>module1/examples/ — hands-on labs</a:t>
+              <a:lnSpc>
+                <a:spcPts val="2200"/>
+              </a:lnSpc>
+              <a:spcAft>
+                <a:spcPts val="1000"/>
+              </a:spcAft>
+              <a:defRPr sz="2000" b="0">
+                <a:solidFill>
+                  <a:srgbClr val="333333"/>
+                </a:solidFill>
+                <a:latin typeface="Calibri"/>
+              </a:defRPr>
+            </a:pPr>
+            <a:r>
+              <a:t>• module1/examples/ — hands-on</a:t>
             </a:r>
           </a:p>
           <a:p>
             <a:pPr>
-              <a:defRPr sz="2000"/>
-            </a:pPr>
-            <a:r>
-              <a:t>module1/CHECKLIST.md — exercises</a:t>
+              <a:lnSpc>
+                <a:spcPts val="2200"/>
+              </a:lnSpc>
+              <a:spcAft>
+                <a:spcPts val="1000"/>
+              </a:spcAft>
+              <a:defRPr sz="2000" b="0">
+                <a:solidFill>
+                  <a:srgbClr val="333333"/>
+                </a:solidFill>
+                <a:latin typeface="Calibri"/>
+              </a:defRPr>
+            </a:pPr>
+            <a:r>
+              <a:t>      labs</a:t>
             </a:r>
           </a:p>
           <a:p>
             <a:pPr>
-              <a:defRPr sz="2000"/>
-            </a:pPr>
-            <a:r>
-              <a:t>./scripts/module1.sh — check &amp; demo</a:t>
+              <a:lnSpc>
+                <a:spcPts val="2200"/>
+              </a:lnSpc>
+              <a:spcAft>
+                <a:spcPts val="1000"/>
+              </a:spcAft>
+              <a:defRPr sz="2000" b="0">
+                <a:solidFill>
+                  <a:srgbClr val="333333"/>
+                </a:solidFill>
+                <a:latin typeface="Calibri"/>
+              </a:defRPr>
+            </a:pPr>
+            <a:r>
+              <a:t>• module1/CHECKLIST.md — exercises</a:t>
+            </a:r>
+          </a:p>
+          <a:p>
+            <a:pPr>
+              <a:lnSpc>
+                <a:spcPts val="2200"/>
+              </a:lnSpc>
+              <a:spcAft>
+                <a:spcPts val="1000"/>
+              </a:spcAft>
+              <a:defRPr sz="2000" b="0">
+                <a:solidFill>
+                  <a:srgbClr val="333333"/>
+                </a:solidFill>
+                <a:latin typeface="Calibri"/>
+              </a:defRPr>
+            </a:pPr>
+            <a:r>
+              <a:t>• ./scripts/module1.sh — check &amp;</a:t>
+            </a:r>
+          </a:p>
+          <a:p>
+            <a:pPr>
+              <a:lnSpc>
+                <a:spcPts val="2200"/>
+              </a:lnSpc>
+              <a:spcAft>
+                <a:spcPts val="1000"/>
+              </a:spcAft>
+              <a:defRPr sz="2000" b="0">
+                <a:solidFill>
+                  <a:srgbClr val="333333"/>
+                </a:solidFill>
+                <a:latin typeface="Calibri"/>
+              </a:defRPr>
+            </a:pPr>
+            <a:r>
+              <a:t>      demo</a:t>
             </a:r>
           </a:p>
         </p:txBody>
@@ -4913,8 +5205,8 @@
         </p:blipFill>
         <p:spPr>
           <a:xfrm>
-            <a:off x="6217920" y="1280160"/>
-            <a:ext cx="5394960" cy="4754880"/>
+            <a:off x="6172200" y="2094547"/>
+            <a:ext cx="5394960" cy="3034665"/>
           </a:xfrm>
           <a:prstGeom prst="rect">
             <a:avLst/>
@@ -4938,16 +5230,20 @@
           <a:noFill/>
         </p:spPr>
         <p:txBody>
-          <a:bodyPr wrap="none">
-            <a:spAutoFit/>
+          <a:bodyPr wrap="square">
+            <a:noAutofit/>
           </a:bodyPr>
           <a:lstStyle/>
           <a:p>
             <a:pPr algn="r">
-              <a:defRPr sz="1000">
+              <a:lnSpc>
+                <a:spcPts val="2200"/>
+              </a:lnSpc>
+              <a:defRPr sz="1000" b="0">
                 <a:solidFill>
                   <a:srgbClr val="666666"/>
                 </a:solidFill>
+                <a:latin typeface="Calibri"/>
               </a:defRPr>
             </a:pPr>
             <a:r>
@@ -4982,8 +5278,8 @@
         </p:nvSpPr>
         <p:spPr>
           <a:xfrm>
-            <a:off x="548640" y="457200"/>
-            <a:ext cx="11064240" cy="731520"/>
+            <a:off x="548640" y="411480"/>
+            <a:ext cx="11064240" cy="777240"/>
           </a:xfrm>
           <a:prstGeom prst="rect">
             <a:avLst/>
@@ -4991,16 +5287,20 @@
           <a:noFill/>
         </p:spPr>
         <p:txBody>
-          <a:bodyPr wrap="none">
-            <a:spAutoFit/>
+          <a:bodyPr wrap="square">
+            <a:noAutofit/>
           </a:bodyPr>
           <a:lstStyle/>
           <a:p>
             <a:pPr>
-              <a:defRPr sz="3200" b="1">
+              <a:lnSpc>
+                <a:spcPts val="2200"/>
+              </a:lnSpc>
+              <a:defRPr sz="2800" b="1">
                 <a:solidFill>
                   <a:srgbClr val="1A1A2E"/>
                 </a:solidFill>
+                <a:latin typeface="Calibri"/>
               </a:defRPr>
             </a:pPr>
             <a:r>
@@ -5017,8 +5317,8 @@
         </p:nvSpPr>
         <p:spPr>
           <a:xfrm>
-            <a:off x="548640" y="1280160"/>
-            <a:ext cx="11064240" cy="4754880"/>
+            <a:off x="548640" y="1234440"/>
+            <a:ext cx="11064240" cy="4937760"/>
           </a:xfrm>
           <a:prstGeom prst="rect">
             <a:avLst/>
@@ -5027,82 +5327,102 @@
         </p:spPr>
         <p:txBody>
           <a:bodyPr wrap="square">
-            <a:spAutoFit/>
+            <a:noAutofit/>
           </a:bodyPr>
           <a:lstStyle/>
           <a:p>
             <a:pPr>
+              <a:lnSpc>
+                <a:spcPts val="2200"/>
+              </a:lnSpc>
               <a:spcAft>
-                <a:spcPts val="800"/>
+                <a:spcPts val="1000"/>
               </a:spcAft>
-              <a:defRPr sz="2000">
+              <a:defRPr sz="2000" b="0">
                 <a:solidFill>
                   <a:srgbClr val="333333"/>
                 </a:solidFill>
-              </a:defRPr>
-            </a:pPr>
-            <a:r>
-              <a:t>Hello terminal — pwd, ls, ls -la</a:t>
+                <a:latin typeface="Calibri"/>
+              </a:defRPr>
+            </a:pPr>
+            <a:r>
+              <a:t>• Hello terminal — pwd, ls, ls -la</a:t>
             </a:r>
           </a:p>
           <a:p>
             <a:pPr>
+              <a:lnSpc>
+                <a:spcPts val="2200"/>
+              </a:lnSpc>
               <a:spcAft>
-                <a:spcPts val="800"/>
+                <a:spcPts val="1000"/>
               </a:spcAft>
-              <a:defRPr sz="2000">
+              <a:defRPr sz="2000" b="0">
                 <a:solidFill>
                   <a:srgbClr val="333333"/>
                 </a:solidFill>
-              </a:defRPr>
-            </a:pPr>
-            <a:r>
-              <a:t>Directory navigation — unix_practice/</a:t>
+                <a:latin typeface="Calibri"/>
+              </a:defRPr>
+            </a:pPr>
+            <a:r>
+              <a:t>• Directory navigation — unix_practice/</a:t>
             </a:r>
           </a:p>
           <a:p>
             <a:pPr>
+              <a:lnSpc>
+                <a:spcPts val="2200"/>
+              </a:lnSpc>
               <a:spcAft>
-                <a:spcPts val="800"/>
+                <a:spcPts val="1000"/>
               </a:spcAft>
-              <a:defRPr sz="2000">
+              <a:defRPr sz="2000" b="0">
                 <a:solidFill>
                   <a:srgbClr val="333333"/>
                 </a:solidFill>
-              </a:defRPr>
-            </a:pPr>
-            <a:r>
-              <a:t>File operations — cp, mv, rm with nano</a:t>
+                <a:latin typeface="Calibri"/>
+              </a:defRPr>
+            </a:pPr>
+            <a:r>
+              <a:t>• File operations — cp, mv, rm with nano</a:t>
             </a:r>
           </a:p>
           <a:p>
             <a:pPr>
+              <a:lnSpc>
+                <a:spcPts val="2200"/>
+              </a:lnSpc>
               <a:spcAft>
-                <a:spcPts val="800"/>
+                <a:spcPts val="1000"/>
               </a:spcAft>
-              <a:defRPr sz="2000">
+              <a:defRPr sz="2000" b="0">
                 <a:solidFill>
                   <a:srgbClr val="333333"/>
                 </a:solidFill>
-              </a:defRPr>
-            </a:pPr>
-            <a:r>
-              <a:t>Viewing — head, tail, less on a long file</a:t>
+                <a:latin typeface="Calibri"/>
+              </a:defRPr>
+            </a:pPr>
+            <a:r>
+              <a:t>• Viewing — head, tail, less on a long file</a:t>
             </a:r>
           </a:p>
           <a:p>
             <a:pPr>
+              <a:lnSpc>
+                <a:spcPts val="2200"/>
+              </a:lnSpc>
               <a:spcAft>
-                <a:spcPts val="800"/>
+                <a:spcPts val="1000"/>
               </a:spcAft>
-              <a:defRPr sz="2000">
+              <a:defRPr sz="2000" b="0">
                 <a:solidFill>
                   <a:srgbClr val="333333"/>
                 </a:solidFill>
-              </a:defRPr>
-            </a:pPr>
-            <a:r>
-              <a:t>Help — man ls, tab completion</a:t>
+                <a:latin typeface="Calibri"/>
+              </a:defRPr>
+            </a:pPr>
+            <a:r>
+              <a:t>• Help — man ls, tab completion</a:t>
             </a:r>
           </a:p>
         </p:txBody>
@@ -5124,16 +5444,20 @@
           <a:noFill/>
         </p:spPr>
         <p:txBody>
-          <a:bodyPr wrap="none">
-            <a:spAutoFit/>
+          <a:bodyPr wrap="square">
+            <a:noAutofit/>
           </a:bodyPr>
           <a:lstStyle/>
           <a:p>
             <a:pPr algn="r">
-              <a:defRPr sz="1000">
+              <a:lnSpc>
+                <a:spcPts val="2200"/>
+              </a:lnSpc>
+              <a:defRPr sz="1000" b="0">
                 <a:solidFill>
                   <a:srgbClr val="666666"/>
                 </a:solidFill>
+                <a:latin typeface="Calibri"/>
               </a:defRPr>
             </a:pPr>
             <a:r>
@@ -5168,8 +5492,8 @@
         </p:nvSpPr>
         <p:spPr>
           <a:xfrm>
-            <a:off x="548640" y="457200"/>
-            <a:ext cx="11064240" cy="731520"/>
+            <a:off x="548640" y="411480"/>
+            <a:ext cx="11064240" cy="777240"/>
           </a:xfrm>
           <a:prstGeom prst="rect">
             <a:avLst/>
@@ -5177,16 +5501,20 @@
           <a:noFill/>
         </p:spPr>
         <p:txBody>
-          <a:bodyPr wrap="none">
-            <a:spAutoFit/>
+          <a:bodyPr wrap="square">
+            <a:noAutofit/>
           </a:bodyPr>
           <a:lstStyle/>
           <a:p>
             <a:pPr>
-              <a:defRPr sz="3200" b="1">
+              <a:lnSpc>
+                <a:spcPts val="2200"/>
+              </a:lnSpc>
+              <a:defRPr sz="2800" b="1">
                 <a:solidFill>
                   <a:srgbClr val="1A1A2E"/>
                 </a:solidFill>
+                <a:latin typeface="Calibri"/>
               </a:defRPr>
             </a:pPr>
             <a:r>
@@ -5203,8 +5531,8 @@
         </p:nvSpPr>
         <p:spPr>
           <a:xfrm>
-            <a:off x="548640" y="1280160"/>
-            <a:ext cx="11064240" cy="4754880"/>
+            <a:off x="548640" y="1234440"/>
+            <a:ext cx="11064240" cy="4937760"/>
           </a:xfrm>
           <a:prstGeom prst="rect">
             <a:avLst/>
@@ -5213,82 +5541,102 @@
         </p:spPr>
         <p:txBody>
           <a:bodyPr wrap="square">
-            <a:spAutoFit/>
+            <a:noAutofit/>
           </a:bodyPr>
           <a:lstStyle/>
           <a:p>
             <a:pPr>
+              <a:lnSpc>
+                <a:spcPts val="2200"/>
+              </a:lnSpc>
               <a:spcAft>
-                <a:spcPts val="800"/>
+                <a:spcPts val="1000"/>
               </a:spcAft>
-              <a:defRPr sz="2000">
+              <a:defRPr sz="2000" b="0">
                 <a:solidFill>
                   <a:srgbClr val="333333"/>
                 </a:solidFill>
-              </a:defRPr>
-            </a:pPr>
-            <a:r>
-              <a:t>Open a terminal and identify your working directory</a:t>
+                <a:latin typeface="Calibri"/>
+              </a:defRPr>
+            </a:pPr>
+            <a:r>
+              <a:t>• Open a terminal and identify your working directory</a:t>
             </a:r>
           </a:p>
           <a:p>
             <a:pPr>
+              <a:lnSpc>
+                <a:spcPts val="2200"/>
+              </a:lnSpc>
               <a:spcAft>
-                <a:spcPts val="800"/>
+                <a:spcPts val="1000"/>
               </a:spcAft>
-              <a:defRPr sz="2000">
+              <a:defRPr sz="2000" b="0">
                 <a:solidFill>
                   <a:srgbClr val="333333"/>
                 </a:solidFill>
-              </a:defRPr>
-            </a:pPr>
-            <a:r>
-              <a:t>Navigate with cd, pwd, and ls</a:t>
+                <a:latin typeface="Calibri"/>
+              </a:defRPr>
+            </a:pPr>
+            <a:r>
+              <a:t>• Navigate with cd, pwd, and ls</a:t>
             </a:r>
           </a:p>
           <a:p>
             <a:pPr>
+              <a:lnSpc>
+                <a:spcPts val="2200"/>
+              </a:lnSpc>
               <a:spcAft>
-                <a:spcPts val="800"/>
+                <a:spcPts val="1000"/>
               </a:spcAft>
-              <a:defRPr sz="2000">
+              <a:defRPr sz="2000" b="0">
                 <a:solidFill>
                   <a:srgbClr val="333333"/>
                 </a:solidFill>
-              </a:defRPr>
-            </a:pPr>
-            <a:r>
-              <a:t>Create, copy, move, and delete files safely</a:t>
+                <a:latin typeface="Calibri"/>
+              </a:defRPr>
+            </a:pPr>
+            <a:r>
+              <a:t>• Create, copy, move, and delete files safely</a:t>
             </a:r>
           </a:p>
           <a:p>
             <a:pPr>
+              <a:lnSpc>
+                <a:spcPts val="2200"/>
+              </a:lnSpc>
               <a:spcAft>
-                <a:spcPts val="800"/>
+                <a:spcPts val="1000"/>
               </a:spcAft>
-              <a:defRPr sz="2000">
+              <a:defRPr sz="2000" b="0">
                 <a:solidFill>
                   <a:srgbClr val="333333"/>
                 </a:solidFill>
-              </a:defRPr>
-            </a:pPr>
-            <a:r>
-              <a:t>View text with cat, less, head, and tail</a:t>
+                <a:latin typeface="Calibri"/>
+              </a:defRPr>
+            </a:pPr>
+            <a:r>
+              <a:t>• View text with cat, less, head, and tail</a:t>
             </a:r>
           </a:p>
           <a:p>
             <a:pPr>
+              <a:lnSpc>
+                <a:spcPts val="2200"/>
+              </a:lnSpc>
               <a:spcAft>
-                <a:spcPts val="800"/>
+                <a:spcPts val="1000"/>
               </a:spcAft>
-              <a:defRPr sz="2000">
+              <a:defRPr sz="2000" b="0">
                 <a:solidFill>
                   <a:srgbClr val="333333"/>
                 </a:solidFill>
-              </a:defRPr>
-            </a:pPr>
-            <a:r>
-              <a:t>Use man and --help to explore commands</a:t>
+                <a:latin typeface="Calibri"/>
+              </a:defRPr>
+            </a:pPr>
+            <a:r>
+              <a:t>• Use man and --help to explore commands</a:t>
             </a:r>
           </a:p>
         </p:txBody>
@@ -5310,16 +5658,20 @@
           <a:noFill/>
         </p:spPr>
         <p:txBody>
-          <a:bodyPr wrap="none">
-            <a:spAutoFit/>
+          <a:bodyPr wrap="square">
+            <a:noAutofit/>
           </a:bodyPr>
           <a:lstStyle/>
           <a:p>
             <a:pPr algn="r">
-              <a:defRPr sz="1000">
+              <a:lnSpc>
+                <a:spcPts val="2200"/>
+              </a:lnSpc>
+              <a:defRPr sz="1000" b="0">
                 <a:solidFill>
                   <a:srgbClr val="666666"/>
                 </a:solidFill>
+                <a:latin typeface="Calibri"/>
               </a:defRPr>
             </a:pPr>
             <a:r>
@@ -5354,8 +5706,8 @@
         </p:nvSpPr>
         <p:spPr>
           <a:xfrm>
-            <a:off x="548640" y="457200"/>
-            <a:ext cx="11064240" cy="731520"/>
+            <a:off x="548640" y="411480"/>
+            <a:ext cx="11064240" cy="777240"/>
           </a:xfrm>
           <a:prstGeom prst="rect">
             <a:avLst/>
@@ -5363,16 +5715,20 @@
           <a:noFill/>
         </p:spPr>
         <p:txBody>
-          <a:bodyPr wrap="none">
-            <a:spAutoFit/>
+          <a:bodyPr wrap="square">
+            <a:noAutofit/>
           </a:bodyPr>
           <a:lstStyle/>
           <a:p>
             <a:pPr>
-              <a:defRPr sz="3200" b="1">
+              <a:lnSpc>
+                <a:spcPts val="2200"/>
+              </a:lnSpc>
+              <a:defRPr sz="2800" b="1">
                 <a:solidFill>
                   <a:srgbClr val="1A1A2E"/>
                 </a:solidFill>
+                <a:latin typeface="Calibri"/>
               </a:defRPr>
             </a:pPr>
             <a:r>
@@ -5389,8 +5745,8 @@
         </p:nvSpPr>
         <p:spPr>
           <a:xfrm>
-            <a:off x="548640" y="1280160"/>
-            <a:ext cx="11064240" cy="4754880"/>
+            <a:off x="548640" y="1234440"/>
+            <a:ext cx="11064240" cy="4937760"/>
           </a:xfrm>
           <a:prstGeom prst="rect">
             <a:avLst/>
@@ -5399,52 +5755,83 @@
         </p:spPr>
         <p:txBody>
           <a:bodyPr wrap="square">
-            <a:spAutoFit/>
+            <a:noAutofit/>
           </a:bodyPr>
           <a:lstStyle/>
           <a:p>
             <a:pPr>
+              <a:lnSpc>
+                <a:spcPts val="2200"/>
+              </a:lnSpc>
               <a:spcAft>
-                <a:spcPts val="800"/>
+                <a:spcPts val="1000"/>
               </a:spcAft>
-              <a:defRPr sz="2000">
+              <a:defRPr sz="2000" b="0">
                 <a:solidFill>
                   <a:srgbClr val="333333"/>
                 </a:solidFill>
-              </a:defRPr>
-            </a:pPr>
-            <a:r>
-              <a:t>You can navigate and manage files from the shell</a:t>
+                <a:latin typeface="Calibri"/>
+              </a:defRPr>
+            </a:pPr>
+            <a:r>
+              <a:t>• You can navigate and manage files from the shell</a:t>
             </a:r>
           </a:p>
           <a:p>
             <a:pPr>
+              <a:lnSpc>
+                <a:spcPts val="2200"/>
+              </a:lnSpc>
               <a:spcAft>
-                <a:spcPts val="800"/>
+                <a:spcPts val="1000"/>
               </a:spcAft>
-              <a:defRPr sz="2000">
+              <a:defRPr sz="2000" b="0">
                 <a:solidFill>
                   <a:srgbClr val="333333"/>
                 </a:solidFill>
-              </a:defRPr>
-            </a:pPr>
-            <a:r>
-              <a:t>Run ./scripts/module1.sh --check before Module 2</a:t>
+                <a:latin typeface="Calibri"/>
+              </a:defRPr>
+            </a:pPr>
+            <a:r>
+              <a:t>• Run ./scripts/module1.sh --check before Module 2</a:t>
             </a:r>
           </a:p>
           <a:p>
             <a:pPr>
+              <a:lnSpc>
+                <a:spcPts val="2200"/>
+              </a:lnSpc>
               <a:spcAft>
-                <a:spcPts val="800"/>
+                <a:spcPts val="1000"/>
               </a:spcAft>
-              <a:defRPr sz="2000">
+              <a:defRPr sz="2000" b="0">
                 <a:solidFill>
                   <a:srgbClr val="333333"/>
                 </a:solidFill>
-              </a:defRPr>
-            </a:pPr>
-            <a:r>
-              <a:t>Next — Module 2: Filesystem, Permissions &amp; Environment</a:t>
+                <a:latin typeface="Calibri"/>
+              </a:defRPr>
+            </a:pPr>
+            <a:r>
+              <a:t>• Next — Module 2: Filesystem, Permissions &amp;</a:t>
+            </a:r>
+          </a:p>
+          <a:p>
+            <a:pPr>
+              <a:lnSpc>
+                <a:spcPts val="2200"/>
+              </a:lnSpc>
+              <a:spcAft>
+                <a:spcPts val="1000"/>
+              </a:spcAft>
+              <a:defRPr sz="2000" b="0">
+                <a:solidFill>
+                  <a:srgbClr val="333333"/>
+                </a:solidFill>
+                <a:latin typeface="Calibri"/>
+              </a:defRPr>
+            </a:pPr>
+            <a:r>
+              <a:t>      Environment</a:t>
             </a:r>
           </a:p>
         </p:txBody>
@@ -5466,16 +5853,20 @@
           <a:noFill/>
         </p:spPr>
         <p:txBody>
-          <a:bodyPr wrap="none">
-            <a:spAutoFit/>
+          <a:bodyPr wrap="square">
+            <a:noAutofit/>
           </a:bodyPr>
           <a:lstStyle/>
           <a:p>
             <a:pPr algn="r">
-              <a:defRPr sz="1000">
+              <a:lnSpc>
+                <a:spcPts val="2200"/>
+              </a:lnSpc>
+              <a:defRPr sz="1000" b="0">
                 <a:solidFill>
                   <a:srgbClr val="666666"/>
                 </a:solidFill>
+                <a:latin typeface="Calibri"/>
               </a:defRPr>
             </a:pPr>
             <a:r>
@@ -5510,8 +5901,8 @@
         </p:nvSpPr>
         <p:spPr>
           <a:xfrm>
-            <a:off x="548640" y="457200"/>
-            <a:ext cx="11064240" cy="731520"/>
+            <a:off x="548640" y="411480"/>
+            <a:ext cx="11064240" cy="777240"/>
           </a:xfrm>
           <a:prstGeom prst="rect">
             <a:avLst/>
@@ -5519,16 +5910,20 @@
           <a:noFill/>
         </p:spPr>
         <p:txBody>
-          <a:bodyPr wrap="none">
-            <a:spAutoFit/>
+          <a:bodyPr wrap="square">
+            <a:noAutofit/>
           </a:bodyPr>
           <a:lstStyle/>
           <a:p>
             <a:pPr>
-              <a:defRPr sz="3200" b="1">
+              <a:lnSpc>
+                <a:spcPts val="2200"/>
+              </a:lnSpc>
+              <a:defRPr sz="2800" b="1">
                 <a:solidFill>
                   <a:srgbClr val="1A1A2E"/>
                 </a:solidFill>
+                <a:latin typeface="Calibri"/>
               </a:defRPr>
             </a:pPr>
             <a:r>
@@ -5545,8 +5940,8 @@
         </p:nvSpPr>
         <p:spPr>
           <a:xfrm>
-            <a:off x="548640" y="1280160"/>
-            <a:ext cx="11064240" cy="4754880"/>
+            <a:off x="548640" y="1234440"/>
+            <a:ext cx="11064240" cy="4937760"/>
           </a:xfrm>
           <a:prstGeom prst="rect">
             <a:avLst/>
@@ -5555,52 +5950,64 @@
         </p:spPr>
         <p:txBody>
           <a:bodyPr wrap="square">
-            <a:spAutoFit/>
+            <a:noAutofit/>
           </a:bodyPr>
           <a:lstStyle/>
           <a:p>
             <a:pPr>
+              <a:lnSpc>
+                <a:spcPts val="2200"/>
+              </a:lnSpc>
               <a:spcAft>
-                <a:spcPts val="800"/>
+                <a:spcPts val="1000"/>
               </a:spcAft>
-              <a:defRPr sz="2000">
+              <a:defRPr sz="2000" b="0">
                 <a:solidFill>
                   <a:srgbClr val="333333"/>
                 </a:solidFill>
-              </a:defRPr>
-            </a:pPr>
-            <a:r>
-              <a:t>Unix-like environment (Linux, macOS, or WSL2)</a:t>
+                <a:latin typeface="Calibri"/>
+              </a:defRPr>
+            </a:pPr>
+            <a:r>
+              <a:t>• Unix-like environment (Linux, macOS, or WSL2)</a:t>
             </a:r>
           </a:p>
           <a:p>
             <a:pPr>
+              <a:lnSpc>
+                <a:spcPts val="2200"/>
+              </a:lnSpc>
               <a:spcAft>
-                <a:spcPts val="800"/>
+                <a:spcPts val="1000"/>
               </a:spcAft>
-              <a:defRPr sz="2000">
+              <a:defRPr sz="2000" b="0">
                 <a:solidFill>
                   <a:srgbClr val="333333"/>
                 </a:solidFill>
-              </a:defRPr>
-            </a:pPr>
-            <a:r>
-              <a:t>Ability to open a terminal and type commands</a:t>
+                <a:latin typeface="Calibri"/>
+              </a:defRPr>
+            </a:pPr>
+            <a:r>
+              <a:t>• Ability to open a terminal and type commands</a:t>
             </a:r>
           </a:p>
           <a:p>
             <a:pPr>
+              <a:lnSpc>
+                <a:spcPts val="2200"/>
+              </a:lnSpc>
               <a:spcAft>
-                <a:spcPts val="800"/>
+                <a:spcPts val="1000"/>
               </a:spcAft>
-              <a:defRPr sz="2000">
+              <a:defRPr sz="2000" b="0">
                 <a:solidFill>
                   <a:srgbClr val="333333"/>
                 </a:solidFill>
-              </a:defRPr>
-            </a:pPr>
-            <a:r>
-              <a:t>No prior shell experience required</a:t>
+                <a:latin typeface="Calibri"/>
+              </a:defRPr>
+            </a:pPr>
+            <a:r>
+              <a:t>• No prior shell experience required</a:t>
             </a:r>
           </a:p>
         </p:txBody>
@@ -5622,16 +6029,20 @@
           <a:noFill/>
         </p:spPr>
         <p:txBody>
-          <a:bodyPr wrap="none">
-            <a:spAutoFit/>
+          <a:bodyPr wrap="square">
+            <a:noAutofit/>
           </a:bodyPr>
           <a:lstStyle/>
           <a:p>
             <a:pPr algn="r">
-              <a:defRPr sz="1000">
+              <a:lnSpc>
+                <a:spcPts val="2200"/>
+              </a:lnSpc>
+              <a:defRPr sz="1000" b="0">
                 <a:solidFill>
                   <a:srgbClr val="666666"/>
                 </a:solidFill>
+                <a:latin typeface="Calibri"/>
               </a:defRPr>
             </a:pPr>
             <a:r>
@@ -5666,8 +6077,8 @@
         </p:nvSpPr>
         <p:spPr>
           <a:xfrm>
-            <a:off x="548640" y="457200"/>
-            <a:ext cx="11064240" cy="731520"/>
+            <a:off x="548640" y="411480"/>
+            <a:ext cx="11064240" cy="777240"/>
           </a:xfrm>
           <a:prstGeom prst="rect">
             <a:avLst/>
@@ -5675,16 +6086,20 @@
           <a:noFill/>
         </p:spPr>
         <p:txBody>
-          <a:bodyPr wrap="none">
-            <a:spAutoFit/>
+          <a:bodyPr wrap="square">
+            <a:noAutofit/>
           </a:bodyPr>
           <a:lstStyle/>
           <a:p>
             <a:pPr>
-              <a:defRPr sz="3200" b="1">
+              <a:lnSpc>
+                <a:spcPts val="2200"/>
+              </a:lnSpc>
+              <a:defRPr sz="2800" b="1">
                 <a:solidFill>
                   <a:srgbClr val="1A1A2E"/>
                 </a:solidFill>
+                <a:latin typeface="Calibri"/>
               </a:defRPr>
             </a:pPr>
             <a:r>
@@ -5709,8 +6124,8 @@
         </p:blipFill>
         <p:spPr>
           <a:xfrm>
-            <a:off x="548640" y="1234440"/>
-            <a:ext cx="11064240" cy="4389120"/>
+            <a:off x="548640" y="1143000"/>
+            <a:ext cx="8128000" cy="4572000"/>
           </a:xfrm>
           <a:prstGeom prst="rect">
             <a:avLst/>
@@ -5725,8 +6140,8 @@
         </p:nvSpPr>
         <p:spPr>
           <a:xfrm>
-            <a:off x="548640" y="5760720"/>
-            <a:ext cx="11064240" cy="457200"/>
+            <a:off x="548640" y="5897880"/>
+            <a:ext cx="11064240" cy="411480"/>
           </a:xfrm>
           <a:prstGeom prst="rect">
             <a:avLst/>
@@ -5734,13 +6149,21 @@
           <a:noFill/>
         </p:spPr>
         <p:txBody>
-          <a:bodyPr wrap="none">
-            <a:spAutoFit/>
+          <a:bodyPr wrap="square">
+            <a:noAutofit/>
           </a:bodyPr>
           <a:lstStyle/>
           <a:p>
             <a:pPr>
-              <a:defRPr sz="1200"/>
+              <a:lnSpc>
+                <a:spcPts val="2200"/>
+              </a:lnSpc>
+              <a:defRPr sz="1200" b="0">
+                <a:solidFill>
+                  <a:srgbClr val="333333"/>
+                </a:solidFill>
+                <a:latin typeface="Calibri"/>
+              </a:defRPr>
             </a:pPr>
             <a:r>
               <a:t>Topics build from terminal basics toward project navigation</a:t>
@@ -5765,16 +6188,20 @@
           <a:noFill/>
         </p:spPr>
         <p:txBody>
-          <a:bodyPr wrap="none">
-            <a:spAutoFit/>
+          <a:bodyPr wrap="square">
+            <a:noAutofit/>
           </a:bodyPr>
           <a:lstStyle/>
           <a:p>
             <a:pPr algn="r">
-              <a:defRPr sz="1000">
+              <a:lnSpc>
+                <a:spcPts val="2200"/>
+              </a:lnSpc>
+              <a:defRPr sz="1000" b="0">
                 <a:solidFill>
                   <a:srgbClr val="666666"/>
                 </a:solidFill>
+                <a:latin typeface="Calibri"/>
               </a:defRPr>
             </a:pPr>
             <a:r>
@@ -5809,8 +6236,8 @@
         </p:nvSpPr>
         <p:spPr>
           <a:xfrm>
-            <a:off x="548640" y="457200"/>
-            <a:ext cx="11064240" cy="731520"/>
+            <a:off x="548640" y="411480"/>
+            <a:ext cx="11064240" cy="777240"/>
           </a:xfrm>
           <a:prstGeom prst="rect">
             <a:avLst/>
@@ -5818,16 +6245,20 @@
           <a:noFill/>
         </p:spPr>
         <p:txBody>
-          <a:bodyPr wrap="none">
-            <a:spAutoFit/>
+          <a:bodyPr wrap="square">
+            <a:noAutofit/>
           </a:bodyPr>
           <a:lstStyle/>
           <a:p>
             <a:pPr>
-              <a:defRPr sz="3200" b="1">
+              <a:lnSpc>
+                <a:spcPts val="2200"/>
+              </a:lnSpc>
+              <a:defRPr sz="2800" b="1">
                 <a:solidFill>
                   <a:srgbClr val="1A1A2E"/>
                 </a:solidFill>
+                <a:latin typeface="Calibri"/>
               </a:defRPr>
             </a:pPr>
             <a:r>
@@ -5844,8 +6275,8 @@
         </p:nvSpPr>
         <p:spPr>
           <a:xfrm>
-            <a:off x="548640" y="1280160"/>
-            <a:ext cx="11064240" cy="4754880"/>
+            <a:off x="548640" y="1234440"/>
+            <a:ext cx="11064240" cy="4937760"/>
           </a:xfrm>
           <a:prstGeom prst="rect">
             <a:avLst/>
@@ -5854,52 +6285,83 @@
         </p:spPr>
         <p:txBody>
           <a:bodyPr wrap="square">
-            <a:spAutoFit/>
+            <a:noAutofit/>
           </a:bodyPr>
           <a:lstStyle/>
           <a:p>
             <a:pPr>
+              <a:lnSpc>
+                <a:spcPts val="2200"/>
+              </a:lnSpc>
               <a:spcAft>
-                <a:spcPts val="800"/>
+                <a:spcPts val="1000"/>
               </a:spcAft>
-              <a:defRPr sz="2000">
+              <a:defRPr sz="2000" b="0">
                 <a:solidFill>
                   <a:srgbClr val="333333"/>
                 </a:solidFill>
-              </a:defRPr>
-            </a:pPr>
-            <a:r>
-              <a:t>Run simulators, scripts, and makefiles from the shell</a:t>
+                <a:latin typeface="Calibri"/>
+              </a:defRPr>
+            </a:pPr>
+            <a:r>
+              <a:t>• Run simulators, scripts, and makefiles from the</a:t>
             </a:r>
           </a:p>
           <a:p>
             <a:pPr>
+              <a:lnSpc>
+                <a:spcPts val="2200"/>
+              </a:lnSpc>
               <a:spcAft>
-                <a:spcPts val="800"/>
+                <a:spcPts val="1000"/>
               </a:spcAft>
-              <a:defRPr sz="2000">
+              <a:defRPr sz="2000" b="0">
                 <a:solidFill>
                   <a:srgbClr val="333333"/>
                 </a:solidFill>
-              </a:defRPr>
-            </a:pPr>
-            <a:r>
-              <a:t>Move between src/, tb/, and build/ directories</a:t>
+                <a:latin typeface="Calibri"/>
+              </a:defRPr>
+            </a:pPr>
+            <a:r>
+              <a:t>      shell</a:t>
             </a:r>
           </a:p>
           <a:p>
             <a:pPr>
+              <a:lnSpc>
+                <a:spcPts val="2200"/>
+              </a:lnSpc>
               <a:spcAft>
-                <a:spcPts val="800"/>
+                <a:spcPts val="1000"/>
               </a:spcAft>
-              <a:defRPr sz="2000">
+              <a:defRPr sz="2000" b="0">
                 <a:solidFill>
                   <a:srgbClr val="333333"/>
                 </a:solidFill>
-              </a:defRPr>
-            </a:pPr>
-            <a:r>
-              <a:t>Inspect logs, RTL, and test output as text files</a:t>
+                <a:latin typeface="Calibri"/>
+              </a:defRPr>
+            </a:pPr>
+            <a:r>
+              <a:t>• Move between src/, tb/, and build/ directories</a:t>
+            </a:r>
+          </a:p>
+          <a:p>
+            <a:pPr>
+              <a:lnSpc>
+                <a:spcPts val="2200"/>
+              </a:lnSpc>
+              <a:spcAft>
+                <a:spcPts val="1000"/>
+              </a:spcAft>
+              <a:defRPr sz="2000" b="0">
+                <a:solidFill>
+                  <a:srgbClr val="333333"/>
+                </a:solidFill>
+                <a:latin typeface="Calibri"/>
+              </a:defRPr>
+            </a:pPr>
+            <a:r>
+              <a:t>• Inspect logs, RTL, and test output as text files</a:t>
             </a:r>
           </a:p>
         </p:txBody>
@@ -5921,16 +6383,20 @@
           <a:noFill/>
         </p:spPr>
         <p:txBody>
-          <a:bodyPr wrap="none">
-            <a:spAutoFit/>
+          <a:bodyPr wrap="square">
+            <a:noAutofit/>
           </a:bodyPr>
           <a:lstStyle/>
           <a:p>
             <a:pPr algn="r">
-              <a:defRPr sz="1000">
+              <a:lnSpc>
+                <a:spcPts val="2200"/>
+              </a:lnSpc>
+              <a:defRPr sz="1000" b="0">
                 <a:solidFill>
                   <a:srgbClr val="666666"/>
                 </a:solidFill>
+                <a:latin typeface="Calibri"/>
               </a:defRPr>
             </a:pPr>
             <a:r>
@@ -5974,13 +6440,21 @@
           <a:noFill/>
         </p:spPr>
         <p:txBody>
-          <a:bodyPr wrap="none">
-            <a:spAutoFit/>
+          <a:bodyPr wrap="square">
+            <a:noAutofit/>
           </a:bodyPr>
           <a:lstStyle/>
           <a:p>
             <a:pPr algn="ctr">
-              <a:defRPr sz="4000" b="1"/>
+              <a:lnSpc>
+                <a:spcPts val="2200"/>
+              </a:lnSpc>
+              <a:defRPr sz="3600" b="1">
+                <a:solidFill>
+                  <a:srgbClr val="1A1A2E"/>
+                </a:solidFill>
+                <a:latin typeface="Calibri"/>
+              </a:defRPr>
             </a:pPr>
             <a:r>
               <a:t>Terminal &amp; navigation</a:t>
@@ -6005,16 +6479,20 @@
           <a:noFill/>
         </p:spPr>
         <p:txBody>
-          <a:bodyPr wrap="none">
-            <a:spAutoFit/>
+          <a:bodyPr wrap="square">
+            <a:noAutofit/>
           </a:bodyPr>
           <a:lstStyle/>
           <a:p>
             <a:pPr algn="r">
-              <a:defRPr sz="1000">
+              <a:lnSpc>
+                <a:spcPts val="2200"/>
+              </a:lnSpc>
+              <a:defRPr sz="1000" b="0">
                 <a:solidFill>
                   <a:srgbClr val="666666"/>
                 </a:solidFill>
+                <a:latin typeface="Calibri"/>
               </a:defRPr>
             </a:pPr>
             <a:r>
@@ -6049,8 +6527,8 @@
         </p:nvSpPr>
         <p:spPr>
           <a:xfrm>
-            <a:off x="548640" y="457200"/>
-            <a:ext cx="11064240" cy="731520"/>
+            <a:off x="548640" y="411480"/>
+            <a:ext cx="11064240" cy="777240"/>
           </a:xfrm>
           <a:prstGeom prst="rect">
             <a:avLst/>
@@ -6058,16 +6536,20 @@
           <a:noFill/>
         </p:spPr>
         <p:txBody>
-          <a:bodyPr wrap="none">
-            <a:spAutoFit/>
+          <a:bodyPr wrap="square">
+            <a:noAutofit/>
           </a:bodyPr>
           <a:lstStyle/>
           <a:p>
             <a:pPr>
-              <a:defRPr sz="3200" b="1">
+              <a:lnSpc>
+                <a:spcPts val="2200"/>
+              </a:lnSpc>
+              <a:defRPr sz="2800" b="1">
                 <a:solidFill>
                   <a:srgbClr val="1A1A2E"/>
                 </a:solidFill>
+                <a:latin typeface="Calibri"/>
               </a:defRPr>
             </a:pPr>
             <a:r>
@@ -6084,8 +6566,8 @@
         </p:nvSpPr>
         <p:spPr>
           <a:xfrm>
-            <a:off x="548640" y="1280160"/>
-            <a:ext cx="11064240" cy="4754880"/>
+            <a:off x="548640" y="1234440"/>
+            <a:ext cx="11064240" cy="4937760"/>
           </a:xfrm>
           <a:prstGeom prst="rect">
             <a:avLst/>
@@ -6094,52 +6576,64 @@
         </p:spPr>
         <p:txBody>
           <a:bodyPr wrap="square">
-            <a:spAutoFit/>
+            <a:noAutofit/>
           </a:bodyPr>
           <a:lstStyle/>
           <a:p>
             <a:pPr>
+              <a:lnSpc>
+                <a:spcPts val="2200"/>
+              </a:lnSpc>
               <a:spcAft>
-                <a:spcPts val="800"/>
+                <a:spcPts val="1000"/>
               </a:spcAft>
-              <a:defRPr sz="2000">
+              <a:defRPr sz="2000" b="0">
                 <a:solidFill>
                   <a:srgbClr val="333333"/>
                 </a:solidFill>
-              </a:defRPr>
-            </a:pPr>
-            <a:r>
-              <a:t>Terminal emulator — the window you type in</a:t>
+                <a:latin typeface="Calibri"/>
+              </a:defRPr>
+            </a:pPr>
+            <a:r>
+              <a:t>• Terminal emulator — the window you type in</a:t>
             </a:r>
           </a:p>
           <a:p>
             <a:pPr>
+              <a:lnSpc>
+                <a:spcPts val="2200"/>
+              </a:lnSpc>
               <a:spcAft>
-                <a:spcPts val="800"/>
+                <a:spcPts val="1000"/>
               </a:spcAft>
-              <a:defRPr sz="2000">
+              <a:defRPr sz="2000" b="0">
                 <a:solidFill>
                   <a:srgbClr val="333333"/>
                 </a:solidFill>
-              </a:defRPr>
-            </a:pPr>
-            <a:r>
-              <a:t>Shell (bash, zsh) — interprets commands</a:t>
+                <a:latin typeface="Calibri"/>
+              </a:defRPr>
+            </a:pPr>
+            <a:r>
+              <a:t>• Shell (bash, zsh) — interprets commands</a:t>
             </a:r>
           </a:p>
           <a:p>
             <a:pPr>
+              <a:lnSpc>
+                <a:spcPts val="2200"/>
+              </a:lnSpc>
               <a:spcAft>
-                <a:spcPts val="800"/>
+                <a:spcPts val="1000"/>
               </a:spcAft>
-              <a:defRPr sz="2000">
+              <a:defRPr sz="2000" b="0">
                 <a:solidFill>
                   <a:srgbClr val="333333"/>
                 </a:solidFill>
-              </a:defRPr>
-            </a:pPr>
-            <a:r>
-              <a:t>Prompt shows user, host, and current directory</a:t>
+                <a:latin typeface="Calibri"/>
+              </a:defRPr>
+            </a:pPr>
+            <a:r>
+              <a:t>• Prompt shows user, host, and current directory</a:t>
             </a:r>
           </a:p>
         </p:txBody>
@@ -6161,16 +6655,20 @@
           <a:noFill/>
         </p:spPr>
         <p:txBody>
-          <a:bodyPr wrap="none">
-            <a:spAutoFit/>
+          <a:bodyPr wrap="square">
+            <a:noAutofit/>
           </a:bodyPr>
           <a:lstStyle/>
           <a:p>
             <a:pPr algn="r">
-              <a:defRPr sz="1000">
+              <a:lnSpc>
+                <a:spcPts val="2200"/>
+              </a:lnSpc>
+              <a:defRPr sz="1000" b="0">
                 <a:solidFill>
                   <a:srgbClr val="666666"/>
                 </a:solidFill>
+                <a:latin typeface="Calibri"/>
               </a:defRPr>
             </a:pPr>
             <a:r>
@@ -6205,8 +6703,8 @@
         </p:nvSpPr>
         <p:spPr>
           <a:xfrm>
-            <a:off x="548640" y="457200"/>
-            <a:ext cx="11064240" cy="731520"/>
+            <a:off x="548640" y="411480"/>
+            <a:ext cx="11064240" cy="777240"/>
           </a:xfrm>
           <a:prstGeom prst="rect">
             <a:avLst/>
@@ -6214,16 +6712,20 @@
           <a:noFill/>
         </p:spPr>
         <p:txBody>
-          <a:bodyPr wrap="none">
-            <a:spAutoFit/>
+          <a:bodyPr wrap="square">
+            <a:noAutofit/>
           </a:bodyPr>
           <a:lstStyle/>
           <a:p>
             <a:pPr>
-              <a:defRPr sz="3200" b="1">
+              <a:lnSpc>
+                <a:spcPts val="2200"/>
+              </a:lnSpc>
+              <a:defRPr sz="2800" b="1">
                 <a:solidFill>
                   <a:srgbClr val="1A1A2E"/>
                 </a:solidFill>
+                <a:latin typeface="Calibri"/>
               </a:defRPr>
             </a:pPr>
             <a:r>
@@ -6240,22 +6742,33 @@
         </p:nvSpPr>
         <p:spPr>
           <a:xfrm>
-            <a:off x="548640" y="1143000"/>
-            <a:ext cx="11064240" cy="548640"/>
+            <a:off x="548640" y="1051560"/>
+            <a:ext cx="11064240" cy="914400"/>
           </a:xfrm>
           <a:prstGeom prst="rect">
             <a:avLst/>
           </a:prstGeom>
-          <a:noFill/>
-        </p:spPr>
-        <p:txBody>
-          <a:bodyPr wrap="none">
-            <a:spAutoFit/>
+          <a:solidFill>
+            <a:srgbClr val="F4F4F4"/>
+          </a:solidFill>
+        </p:spPr>
+        <p:txBody>
+          <a:bodyPr wrap="square">
+            <a:noAutofit/>
           </a:bodyPr>
           <a:lstStyle/>
           <a:p>
             <a:pPr>
-              <a:defRPr sz="1400">
+              <a:lnSpc>
+                <a:spcPts val="2200"/>
+              </a:lnSpc>
+              <a:spcAft>
+                <a:spcPts val="200"/>
+              </a:spcAft>
+              <a:defRPr sz="2000" b="0">
+                <a:solidFill>
+                  <a:srgbClr val="333333"/>
+                </a:solidFill>
                 <a:latin typeface="Consolas"/>
               </a:defRPr>
             </a:pPr>
@@ -6281,8 +6794,8 @@
         </p:blipFill>
         <p:spPr>
           <a:xfrm>
-            <a:off x="548640" y="1828800"/>
-            <a:ext cx="11064240" cy="3840480"/>
+            <a:off x="548640" y="1965960"/>
+            <a:ext cx="7071358" cy="3977639"/>
           </a:xfrm>
           <a:prstGeom prst="rect">
             <a:avLst/>
@@ -6306,16 +6819,20 @@
           <a:noFill/>
         </p:spPr>
         <p:txBody>
-          <a:bodyPr wrap="none">
-            <a:spAutoFit/>
+          <a:bodyPr wrap="square">
+            <a:noAutofit/>
           </a:bodyPr>
           <a:lstStyle/>
           <a:p>
             <a:pPr algn="r">
-              <a:defRPr sz="1000">
+              <a:lnSpc>
+                <a:spcPts val="2200"/>
+              </a:lnSpc>
+              <a:defRPr sz="1000" b="0">
                 <a:solidFill>
                   <a:srgbClr val="666666"/>
                 </a:solidFill>
+                <a:latin typeface="Calibri"/>
               </a:defRPr>
             </a:pPr>
             <a:r>
@@ -6350,8 +6867,8 @@
         </p:nvSpPr>
         <p:spPr>
           <a:xfrm>
-            <a:off x="548640" y="457200"/>
-            <a:ext cx="11064240" cy="731520"/>
+            <a:off x="548640" y="411480"/>
+            <a:ext cx="11064240" cy="777240"/>
           </a:xfrm>
           <a:prstGeom prst="rect">
             <a:avLst/>
@@ -6359,16 +6876,20 @@
           <a:noFill/>
         </p:spPr>
         <p:txBody>
-          <a:bodyPr wrap="none">
-            <a:spAutoFit/>
+          <a:bodyPr wrap="square">
+            <a:noAutofit/>
           </a:bodyPr>
           <a:lstStyle/>
           <a:p>
             <a:pPr>
-              <a:defRPr sz="3200" b="1">
+              <a:lnSpc>
+                <a:spcPts val="2200"/>
+              </a:lnSpc>
+              <a:defRPr sz="2800" b="1">
                 <a:solidFill>
                   <a:srgbClr val="1A1A2E"/>
                 </a:solidFill>
+                <a:latin typeface="Calibri"/>
               </a:defRPr>
             </a:pPr>
             <a:r>
@@ -6385,7 +6906,7 @@
         </p:nvSpPr>
         <p:spPr>
           <a:xfrm>
-            <a:off x="548640" y="1234440"/>
+            <a:off x="548640" y="1143000"/>
             <a:ext cx="11064240" cy="5029200"/>
           </a:xfrm>
           <a:prstGeom prst="rect">
@@ -6397,12 +6918,18 @@
         </p:spPr>
         <p:txBody>
           <a:bodyPr wrap="square">
-            <a:spAutoFit/>
+            <a:noAutofit/>
           </a:bodyPr>
           <a:lstStyle/>
           <a:p>
             <a:pPr>
-              <a:defRPr sz="1400">
+              <a:lnSpc>
+                <a:spcPts val="2200"/>
+              </a:lnSpc>
+              <a:spcAft>
+                <a:spcPts val="400"/>
+              </a:spcAft>
+              <a:defRPr sz="2000" b="0">
                 <a:solidFill>
                   <a:srgbClr val="333333"/>
                 </a:solidFill>
@@ -6412,23 +6939,98 @@
             <a:r>
               <a:t>pwd</a:t>
             </a:r>
-            <a:br/>
+          </a:p>
+          <a:p>
+            <a:pPr>
+              <a:lnSpc>
+                <a:spcPts val="2200"/>
+              </a:lnSpc>
+              <a:spcAft>
+                <a:spcPts val="400"/>
+              </a:spcAft>
+              <a:defRPr sz="2000" b="0">
+                <a:solidFill>
+                  <a:srgbClr val="333333"/>
+                </a:solidFill>
+                <a:latin typeface="Consolas"/>
+              </a:defRPr>
+            </a:pPr>
             <a:r>
               <a:t>ls</a:t>
             </a:r>
-            <a:br/>
+          </a:p>
+          <a:p>
+            <a:pPr>
+              <a:lnSpc>
+                <a:spcPts val="2200"/>
+              </a:lnSpc>
+              <a:spcAft>
+                <a:spcPts val="400"/>
+              </a:spcAft>
+              <a:defRPr sz="2000" b="0">
+                <a:solidFill>
+                  <a:srgbClr val="333333"/>
+                </a:solidFill>
+                <a:latin typeface="Consolas"/>
+              </a:defRPr>
+            </a:pPr>
             <a:r>
               <a:t>ls -la</a:t>
             </a:r>
-            <a:br/>
+          </a:p>
+          <a:p>
+            <a:pPr>
+              <a:lnSpc>
+                <a:spcPts val="2200"/>
+              </a:lnSpc>
+              <a:spcAft>
+                <a:spcPts val="400"/>
+              </a:spcAft>
+              <a:defRPr sz="2000" b="0">
+                <a:solidFill>
+                  <a:srgbClr val="333333"/>
+                </a:solidFill>
+                <a:latin typeface="Consolas"/>
+              </a:defRPr>
+            </a:pPr>
             <a:r>
               <a:t>cd ~/projects</a:t>
             </a:r>
-            <a:br/>
+          </a:p>
+          <a:p>
+            <a:pPr>
+              <a:lnSpc>
+                <a:spcPts val="2200"/>
+              </a:lnSpc>
+              <a:spcAft>
+                <a:spcPts val="400"/>
+              </a:spcAft>
+              <a:defRPr sz="2000" b="0">
+                <a:solidFill>
+                  <a:srgbClr val="333333"/>
+                </a:solidFill>
+                <a:latin typeface="Consolas"/>
+              </a:defRPr>
+            </a:pPr>
             <a:r>
               <a:t>cd ..</a:t>
             </a:r>
-            <a:br/>
+          </a:p>
+          <a:p>
+            <a:pPr>
+              <a:lnSpc>
+                <a:spcPts val="2200"/>
+              </a:lnSpc>
+              <a:spcAft>
+                <a:spcPts val="400"/>
+              </a:spcAft>
+              <a:defRPr sz="2000" b="0">
+                <a:solidFill>
+                  <a:srgbClr val="333333"/>
+                </a:solidFill>
+                <a:latin typeface="Consolas"/>
+              </a:defRPr>
+            </a:pPr>
             <a:r>
               <a:t>cd -</a:t>
             </a:r>
@@ -6452,16 +7054,20 @@
           <a:noFill/>
         </p:spPr>
         <p:txBody>
-          <a:bodyPr wrap="none">
-            <a:spAutoFit/>
+          <a:bodyPr wrap="square">
+            <a:noAutofit/>
           </a:bodyPr>
           <a:lstStyle/>
           <a:p>
             <a:pPr algn="r">
-              <a:defRPr sz="1000">
+              <a:lnSpc>
+                <a:spcPts val="2200"/>
+              </a:lnSpc>
+              <a:defRPr sz="1000" b="0">
                 <a:solidFill>
                   <a:srgbClr val="666666"/>
                 </a:solidFill>
+                <a:latin typeface="Calibri"/>
               </a:defRPr>
             </a:pPr>
             <a:r>
